--- a/whimzmaxx/decks/The-Diary.pptx
+++ b/whimzmaxx/decks/The-Diary.pptx
@@ -151,7 +151,7 @@
   <p:extLst>
     <p:ext uri="{521415D9-36F7-43E2-AB2F-B90AF26B5E84}">
       <p14:sectionLst xmlns:p14="http://schemas.microsoft.com/office/powerpoint/2010/main">
-        <p14:section name="Storyboard: circle their ad" id="{de3dcd03-bebe-6913-60bc-927255e7f38e}">
+        <p14:section name="Storyboard: circle their ad" id="{cff533c6-fff7-65c6-aa40-05d7c686af7b}">
           <p14:sldIdLst>
             <p14:sldId id="256"/>
             <p14:sldId id="257"/>
@@ -165,7 +165,7 @@
             <p14:sldId id="265"/>
           </p14:sldIdLst>
         </p14:section>
-        <p14:section name="The product is the language" id="{93df893b-d834-721f-7a99-5de579e42353}">
+        <p14:section name="The product is the language" id="{bae740a1-f447-4d5a-a547-bf3ac66eb61e}">
           <p14:sldIdLst>
             <p14:sldId id="266"/>
             <p14:sldId id="267"/>
@@ -175,7 +175,7 @@
             <p14:sldId id="271"/>
           </p14:sldIdLst>
         </p14:section>
-        <p14:section name="A duct tape commercial" id="{f0929413-1429-4f46-e343-423190895076}">
+        <p14:section name="A duct tape commercial" id="{8e335413-6584-5402-8866-0c8cfe95c4d4}">
           <p14:sldIdLst>
             <p14:sldId id="272"/>
             <p14:sldId id="273"/>
@@ -184,7 +184,7 @@
             <p14:sldId id="276"/>
           </p14:sldIdLst>
         </p14:section>
-        <p14:section name="The circle instead" id="{325bb5c6-522a-c1bb-0d54-ff90d43d5721}">
+        <p14:section name="The circle instead" id="{56b06740-1549-06cf-fe18-9b0dc91341a4}">
           <p14:sldIdLst>
             <p14:sldId id="277"/>
             <p14:sldId id="278"/>
@@ -192,13 +192,13 @@
             <p14:sldId id="280"/>
           </p14:sldIdLst>
         </p14:section>
-        <p14:section name="Answer: the pptx rule" id="{d685b310-61d9-9c1e-0de5-7f886055a33f}">
+        <p14:section name="Answer: the pptx rule" id="{7ede6786-ec23-6c74-d96d-09ba3ef83022}">
           <p14:sldIdLst>
             <p14:sldId id="281"/>
             <p14:sldId id="282"/>
           </p14:sldIdLst>
         </p14:section>
-        <p14:section name="Systemic solutions" id="{465e1adf-c33a-b2db-313b-347c06b7cb51}">
+        <p14:section name="Systemic solutions" id="{cff7e4aa-cc13-f3a9-2f9b-1edf77485112}">
           <p14:sldIdLst>
             <p14:sldId id="283"/>
             <p14:sldId id="284"/>
@@ -207,38 +207,38 @@
             <p14:sldId id="287"/>
           </p14:sldIdLst>
         </p14:section>
-        <p14:section name="Book or dot" id="{476b6e9a-051f-fca8-f532-4e0ca9e06fb1}">
+        <p14:section name="Book or dot" id="{0681c032-e43a-22a7-befd-b978d516bd28}">
           <p14:sldIdLst>
             <p14:sldId id="288"/>
             <p14:sldId id="289"/>
             <p14:sldId id="290"/>
           </p14:sldIdLst>
         </p14:section>
-        <p14:section name="Saab" id="{c141cb5d-2fc3-a517-4a69-0fd1e3d54364}">
+        <p14:section name="Saab" id="{8d8a495e-3ee5-7bbb-40b9-8bce8a3aeb5a}">
           <p14:sldIdLst>
             <p14:sldId id="291"/>
           </p14:sldIdLst>
         </p14:section>
-        <p14:section name="The asaaab way" id="{99ed93c2-31e7-302f-70a3-bd1a84542b5c}">
+        <p14:section name="The asaaab way" id="{286b8919-77be-7513-f694-5112ea99a7ba}">
           <p14:sldIdLst>
             <p14:sldId id="292"/>
             <p14:sldId id="293"/>
             <p14:sldId id="294"/>
           </p14:sldIdLst>
         </p14:section>
-        <p14:section name="The feeling" id="{74fc36a2-3ee4-a3e4-3b14-6a6ddac835b4}">
+        <p14:section name="The feeling" id="{4769794c-81f9-0a8b-94e0-97d6fc0e4e38}">
           <p14:sldIdLst>
             <p14:sldId id="295"/>
             <p14:sldId id="296"/>
           </p14:sldIdLst>
         </p14:section>
-        <p14:section name="Imagine slavery" id="{fb401dbc-7bde-0fa5-e2f7-e9873fad8d5d}">
+        <p14:section name="Imagine slavery" id="{48052436-3ddd-c651-c349-9b391490e0c4}">
           <p14:sldIdLst>
             <p14:sldId id="297"/>
             <p14:sldId id="298"/>
           </p14:sldIdLst>
         </p14:section>
-        <p14:section name="The asaaab answer" id="{a53967c2-d772-a523-2c8e-9bc6f1bca14a}">
+        <p14:section name="The asaaab answer" id="{3939f661-81e5-8136-caaa-ef9c7a41154c}">
           <p14:sldIdLst>
             <p14:sldId id="299"/>
             <p14:sldId id="300"/>
@@ -1719,7 +1719,7 @@
           <a:p>
             <a:r>
               <a:rPr lang="en-US" dirty="0"/>
-              <a:t>Method: ffmpeg pulled one frame per second; every on-screen word was read off the frames. The spoken words come from the ad's burned-in captions, which show a few words at a time, so some phrases are partial. The audio itself wasn't transcribed (no speech-to-text in this workspace).</a:t>
+              <a:t>Method (corrected 10/26 11:15pm): the first pass read one frame per second and missed words; it also put a Gemini line in the ad that isn't there. Now every caption change is read at 6–15 fps (tools/ad/captions.py plus caption-strip sheets), including where the captions move up the screen. Full transcript: docs/ads/perplexity-computer-transcript.md. Two stretches (13–17 s, 23–31 s) carry graphics but no captions; the audio there wasn't transcribed (no speech-to-text in this workspace).</a:t>
             </a:r>
             <a:endParaRPr lang="en-US" dirty="0"/>
           </a:p>
@@ -1895,7 +1895,7 @@
           <a:p>
             <a:r>
               <a:rPr lang="en-US" dirty="0"/>
-              <a:t>Their frame at 0:00–0:05, from the frame-by-frame read in "A Duct Tape Commercial". Production: freeze their frame, Captain draws the red circle by hand on the phone (finger, not a generated graphic), VO over it. The hole line is the on-screen caption.</a:t>
+              <a:t>Their frame at 0:01–0:05, from the frame-by-frame read in "A Duct Tape Commercial". Production: freeze their frame, Captain draws the red circle by hand on the phone (finger, not a generated graphic), VO over it. The hole line is the on-screen caption.</a:t>
             </a:r>
             <a:endParaRPr lang="en-US" dirty="0"/>
           </a:p>
@@ -2863,7 +2863,7 @@
           <a:p>
             <a:r>
               <a:rPr lang="en-US" dirty="0"/>
-              <a:t>Their frame at 0:19–0:33, from the frame-by-frame read in "A Duct Tape Commercial". Production: freeze their frame, Captain draws the red circle by hand on the phone (finger, not a generated graphic), VO over it. The hole line is the on-screen caption.</a:t>
+              <a:t>Their frame at 0:18–0:23, from the frame-by-frame read in "A Duct Tape Commercial". Production: freeze their frame, Captain draws the red circle by hand on the phone (finger, not a generated graphic), VO over it. The hole line is the on-screen caption.</a:t>
             </a:r>
             <a:endParaRPr lang="en-US" dirty="0"/>
           </a:p>
@@ -3831,7 +3831,7 @@
           <a:p>
             <a:r>
               <a:rPr lang="en-US" dirty="0"/>
-              <a:t>Their frame at 0:34–0:40, from the frame-by-frame read in "A Duct Tape Commercial". Production: freeze their frame, Captain draws the red circle by hand on the phone (finger, not a generated graphic), VO over it. The hole line is the on-screen caption.</a:t>
+              <a:t>Their frame at 0:38–0:42, from the frame-by-frame read in "A Duct Tape Commercial". Production: freeze their frame, Captain draws the red circle by hand on the phone (finger, not a generated graphic), VO over it. The hole line is the on-screen caption.</a:t>
             </a:r>
             <a:endParaRPr lang="en-US" dirty="0"/>
           </a:p>
@@ -4447,7 +4447,7 @@
           <a:p>
             <a:r>
               <a:rPr lang="en-US" dirty="0"/>
-              <a:t>Their frame at 0:41–0:50, from the frame-by-frame read in "A Duct Tape Commercial". Production: freeze their frame, Captain draws the red circle by hand on the phone (finger, not a generated graphic), VO over it. The hole line is the on-screen caption.</a:t>
+              <a:t>Their frame at 0:47–0:52, from the frame-by-frame read in "A Duct Tape Commercial". Production: freeze their frame, Captain draws the red circle by hand on the phone (finger, not a generated graphic), VO over it. The hole line is the on-screen caption.</a:t>
             </a:r>
             <a:endParaRPr lang="en-US" dirty="0"/>
           </a:p>
@@ -4535,7 +4535,7 @@
           <a:p>
             <a:r>
               <a:rPr lang="en-US" dirty="0"/>
-              <a:t>Their frame at 0:51–0:66, from the frame-by-frame read in "A Duct Tape Commercial". Production: freeze their frame, Captain draws the red circle by hand on the phone (finger, not a generated graphic), VO over it. The hole line is the on-screen caption.</a:t>
+              <a:t>Their frame at 0:58–0:65, from the frame-by-frame read in "A Duct Tape Commercial". Production: freeze their frame, Captain draws the red circle by hand on the phone (finger, not a generated graphic), VO over it. The hole line is the on-screen caption.</a:t>
             </a:r>
             <a:endParaRPr lang="en-US" dirty="0"/>
           </a:p>
@@ -4623,7 +4623,7 @@
           <a:p>
             <a:r>
               <a:rPr lang="en-US" dirty="0"/>
-              <a:t>Their frame at 0:67, from the frame-by-frame read in "A Duct Tape Commercial". Production: freeze their frame, Captain draws the red circle by hand on the phone (finger, not a generated graphic), VO over it. The hole line is the on-screen caption.</a:t>
+              <a:t>Their frame at 0:66–0:67, from the frame-by-frame read in "A Duct Tape Commercial". Production: freeze their frame, Captain draws the red circle by hand on the phone (finger, not a generated graphic), VO over it. The hole line is the on-screen caption.</a:t>
             </a:r>
             <a:endParaRPr lang="en-US" dirty="0"/>
           </a:p>
@@ -8171,7 +8171,7 @@
                 <a:ea typeface="Century Schoolbook" pitchFamily="34" charset="-122"/>
                 <a:cs typeface="Century Schoolbook" pitchFamily="34" charset="-120"/>
               </a:rPr>
-              <a:t>68</a:t>
+              <a:t>411</a:t>
             </a:r>
             <a:endParaRPr lang="en-US" sz="3000" dirty="0"/>
           </a:p>
@@ -8207,7 +8207,7 @@
                   <a:schemeClr val="tx2"/>
                 </a:solidFill>
               </a:rPr>
-              <a:t>frames read, one per second</a:t>
+              <a:t>frames read, six per second</a:t>
             </a:r>
             <a:endParaRPr lang="en-US" sz="1400" dirty="0"/>
           </a:p>
@@ -8639,7 +8639,7 @@
                             <a:srgbClr val="17181D"/>
                           </a:solidFill>
                         </a:rPr>
-                        <a:t>0–5 s</a:t>
+                        <a:t>1–5 s</a:t>
                       </a:r>
                       <a:endParaRPr lang="en-US" sz="1100" dirty="0"/>
                     </a:p>
@@ -8697,7 +8697,7 @@
                             <a:srgbClr val="17181D"/>
                           </a:solidFill>
                         </a:rPr>
-                        <a:t>“the first AI that works” · “AI was supposed to…” · “Work, meet Computer”</a:t>
+                        <a:t>“This is the first AI tool that works the way AI was actually supposed to: Perplexity Computer”</a:t>
                       </a:r>
                       <a:endParaRPr lang="en-US" sz="1100" dirty="0"/>
                     </a:p>
@@ -8757,7 +8757,7 @@
                             <a:srgbClr val="17181D"/>
                           </a:solidFill>
                         </a:rPr>
-                        <a:t>6–12 s</a:t>
+                        <a:t>6–13 s</a:t>
                       </a:r>
                       <a:endParaRPr lang="en-US" sz="1100" dirty="0"/>
                     </a:p>
@@ -8815,7 +8815,7 @@
                             <a:srgbClr val="17181D"/>
                           </a:solidFill>
                         </a:rPr>
-                        <a:t>Task: build a “Creative Project Pricing Calculator” for freelancers</a:t>
+                        <a:t>Task: “build a beautiful pricing calculator to help freelancers estimate pricing and generate proposals, instead of using just one model”</a:t>
                       </a:r>
                       <a:endParaRPr lang="en-US" sz="1100" dirty="0"/>
                     </a:p>
@@ -8875,7 +8875,7 @@
                             <a:srgbClr val="17181D"/>
                           </a:solidFill>
                         </a:rPr>
-                        <a:t>13–18 s</a:t>
+                        <a:t>13–17 s</a:t>
                       </a:r>
                       <a:endParaRPr lang="en-US" sz="1100" dirty="0"/>
                     </a:p>
@@ -8933,7 +8933,7 @@
                             <a:srgbClr val="17181D"/>
                           </a:solidFill>
                         </a:rPr>
-                        <a:t>One model (Gemini) is “great, but not so much for design”</a:t>
+                        <a:t>Graphic, no captions: Gemini 3 — Deep Research, Visual Design, Complex Reasoning, Speed, Video Generation</a:t>
                       </a:r>
                       <a:endParaRPr lang="en-US" sz="1100" dirty="0"/>
                     </a:p>
@@ -8993,7 +8993,7 @@
                             <a:srgbClr val="17181D"/>
                           </a:solidFill>
                         </a:rPr>
-                        <a:t>19–33 s</a:t>
+                        <a:t>18–31 s</a:t>
                       </a:r>
                       <a:endParaRPr lang="en-US" sz="1100" dirty="0"/>
                     </a:p>
@@ -9051,7 +9051,7 @@
                             <a:srgbClr val="17181D"/>
                           </a:solidFill>
                         </a:rPr>
-                        <a:t>Computer “breaks it down” into subtasks, “orchestrates 19 AI models”: Gemini research, Grok math, Nano Banana design, Claude Opus reasoning</a:t>
+                        <a:t>“breaks it down into parallel subtasks and orchestrates 19 specialized AI models” · graphic: research, fast calculations, design, advanced reasoning</a:t>
                       </a:r>
                       <a:endParaRPr lang="en-US" sz="1100" dirty="0"/>
                     </a:p>
@@ -9111,7 +9111,7 @@
                             <a:srgbClr val="17181D"/>
                           </a:solidFill>
                         </a:rPr>
-                        <a:t>34–40 s</a:t>
+                        <a:t>31–42 s</a:t>
                       </a:r>
                       <a:endParaRPr lang="en-US" sz="1100" dirty="0"/>
                     </a:p>
@@ -9169,7 +9169,7 @@
                             <a:srgbClr val="17181D"/>
                           </a:solidFill>
                         </a:rPr>
-                        <a:t>“like your team of experts”: CPA, designer, developer, copywriter, analyst</a:t>
+                        <a:t>“highest possible quality” · “your personal team of experts who trained their whole lives for their specific job” (CPA, Senior Designer, Software Developer icons)</a:t>
                       </a:r>
                       <a:endParaRPr lang="en-US" sz="1100" dirty="0"/>
                     </a:p>
@@ -9229,7 +9229,7 @@
                             <a:srgbClr val="17181D"/>
                           </a:solidFill>
                         </a:rPr>
-                        <a:t>41–50 s</a:t>
+                        <a:t>42–52 s</a:t>
                       </a:r>
                       <a:endParaRPr lang="en-US" sz="1100" dirty="0"/>
                     </a:p>
@@ -9287,7 +9287,7 @@
                             <a:srgbClr val="17181D"/>
                           </a:solidFill>
                         </a:rPr>
-                        <a:t>Runs your business: supply tracking, P&amp;L dashboards, a $71,400 proposal</a:t>
+                        <a:t>“register your business, automate emails, monitor supply” · “a custom app tailored to my unique sales process” ($71,400 on screen)</a:t>
                       </a:r>
                       <a:endParaRPr lang="en-US" sz="1100" dirty="0"/>
                     </a:p>
@@ -9347,7 +9347,7 @@
                             <a:srgbClr val="17181D"/>
                           </a:solidFill>
                         </a:rPr>
-                        <a:t>51–66 s</a:t>
+                        <a:t>52–65 s</a:t>
                       </a:r>
                       <a:endParaRPr lang="en-US" sz="1100" dirty="0"/>
                     </a:p>
@@ -9405,7 +9405,7 @@
                             <a:srgbClr val="17181D"/>
                           </a:solidFill>
                         </a:rPr>
-                        <a:t>“thousands of apps” (Dropbox, Figma, Notion…) · “context of all my work” · “until now”</a:t>
+                        <a:t>“thousands of connectors to apps like Dropbox, Figma, Notion” · “the full context of all my work, across all my apps … until now”</a:t>
                       </a:r>
                       <a:endParaRPr lang="en-US" sz="1100" dirty="0"/>
                     </a:p>
@@ -9465,7 +9465,7 @@
                             <a:srgbClr val="17181D"/>
                           </a:solidFill>
                         </a:rPr>
-                        <a:t>67 s</a:t>
+                        <a:t>65–67 s</a:t>
                       </a:r>
                       <a:endParaRPr lang="en-US" sz="1100" dirty="0"/>
                     </a:p>
@@ -9523,7 +9523,7 @@
                             <a:srgbClr val="17181D"/>
                           </a:solidFill>
                         </a:rPr>
-                        <a:t>“try Computer.”</a:t>
+                        <a:t>“Click the link below to try Computer.”</a:t>
                       </a:r>
                       <a:endParaRPr lang="en-US" sz="1100" dirty="0"/>
                     </a:p>
@@ -9675,7 +9675,7 @@
                 <a:ea typeface="Century Schoolbook" pitchFamily="34" charset="-122"/>
                 <a:cs typeface="Century Schoolbook" pitchFamily="34" charset="-120"/>
               </a:rPr>
-              <a:t>Shot 1 · their 0:00–0:05</a:t>
+              <a:t>Shot 1 · their 0:01–0:05</a:t>
             </a:r>
             <a:endParaRPr lang="en-US" sz="2200" dirty="0"/>
           </a:p>
@@ -9738,7 +9738,7 @@
                   <a:schemeClr val="bg1"/>
                 </a:solidFill>
               </a:rPr>
-              <a:t>Their open: “the first AI that works” · “AI was supposed to…”</a:t>
+              <a:t>“This is the first AI tool that works the way AI was actually supposed to”</a:t>
             </a:r>
             <a:endParaRPr lang="en-US" sz="1100" dirty="0"/>
           </a:p>
@@ -10315,7 +10315,7 @@
                   <a:schemeClr val="accent2"/>
                 </a:solidFill>
               </a:rPr>
-              <a:t>A CPA’s, a designer’s, a developer’s whole lives become five gray avatars. Nobody in the ad is paid.</a:t>
+              <a:t>“Experts who trained their whole lives” become gray icons. Nobody in the ad is paid.</a:t>
             </a:r>
             <a:endParaRPr lang="en-US" sz="1300" dirty="0"/>
           </a:p>
@@ -13987,7 +13987,7 @@
                 <a:ea typeface="Century Schoolbook" pitchFamily="34" charset="-122"/>
                 <a:cs typeface="Century Schoolbook" pitchFamily="34" charset="-120"/>
               </a:rPr>
-              <a:t>Shot 2 · their 0:19–0:33</a:t>
+              <a:t>Shot 2 · their 0:18–0:23</a:t>
             </a:r>
             <a:endParaRPr lang="en-US" sz="2200" dirty="0"/>
           </a:p>
@@ -14050,7 +14050,7 @@
                   <a:schemeClr val="bg1"/>
                 </a:solidFill>
               </a:rPr>
-              <a:t>“orchestrates 19 AI models” — Gemini, Grok, Nano Banana, Claude</a:t>
+              <a:t>“breaks it down into parallel subtasks and orchestrates 19 specialized AI models”</a:t>
             </a:r>
             <a:endParaRPr lang="en-US" sz="1100" dirty="0"/>
           </a:p>
@@ -21366,7 +21366,7 @@
                 <a:ea typeface="Century Schoolbook" pitchFamily="34" charset="-122"/>
                 <a:cs typeface="Century Schoolbook" pitchFamily="34" charset="-120"/>
               </a:rPr>
-              <a:t>Shot 3 · their 0:34–0:40</a:t>
+              <a:t>Shot 3 · their 0:38–0:42</a:t>
             </a:r>
             <a:endParaRPr lang="en-US" sz="2200" dirty="0"/>
           </a:p>
@@ -21429,7 +21429,7 @@
                   <a:schemeClr val="bg1"/>
                 </a:solidFill>
               </a:rPr>
-              <a:t>“like your team of experts”: five gray avatars, CPA, designer, developer, copywriter, analyst</a:t>
+              <a:t>“your personal team of experts who trained their whole lives for their specific job” (gray icons)</a:t>
             </a:r>
             <a:endParaRPr lang="en-US" sz="1100" dirty="0"/>
           </a:p>
@@ -21487,7 +21487,7 @@
                   <a:schemeClr val="accent1"/>
                 </a:solidFill>
               </a:rPr>
-              <a:t>the five icons</a:t>
+              <a:t>“whole lives”</a:t>
             </a:r>
             <a:endParaRPr lang="en-US" sz="1200" dirty="0"/>
           </a:p>
@@ -21559,7 +21559,7 @@
                   <a:schemeClr val="accent1"/>
                 </a:solidFill>
               </a:rPr>
-              <a:t>the five icons</a:t>
+              <a:t>“whole lives”</a:t>
             </a:r>
             <a:endParaRPr lang="en-US" sz="1600" dirty="0"/>
           </a:p>
@@ -21631,7 +21631,7 @@
                   <a:schemeClr val="tx1"/>
                 </a:solidFill>
               </a:rPr>
-              <a:t>A CPA’s, a designer’s, a developer’s whole lives become icons. Nobody in this ad gets paid.</a:t>
+              <a:t>People trained their whole lives, and the ad turns them into gray icons. Nobody in it gets paid.</a:t>
             </a:r>
             <a:endParaRPr lang="en-US" sz="1600" dirty="0"/>
           </a:p>
@@ -21703,7 +21703,7 @@
                   <a:schemeClr val="accent4"/>
                 </a:solidFill>
               </a:rPr>
-              <a:t>“Your team of experts. Who’s paying them?”</a:t>
+              <a:t>“Their whole lives. Who’s paying them?”</a:t>
             </a:r>
             <a:endParaRPr lang="en-US" sz="1600" dirty="0"/>
           </a:p>
@@ -23948,7 +23948,7 @@
                 <a:ea typeface="Century Schoolbook" pitchFamily="34" charset="-122"/>
                 <a:cs typeface="Century Schoolbook" pitchFamily="34" charset="-120"/>
               </a:rPr>
-              <a:t>Shot 4 · their 0:41–0:50</a:t>
+              <a:t>Shot 4 · their 0:47–0:52</a:t>
             </a:r>
             <a:endParaRPr lang="en-US" sz="2200" dirty="0"/>
           </a:p>
@@ -24011,7 +24011,7 @@
                   <a:schemeClr val="bg1"/>
                 </a:solidFill>
               </a:rPr>
-              <a:t>P&amp;L dashboards, a $71,400 proposal</a:t>
+              <a:t>“a custom app tailored to my unique sales process” ($71,400 on screen)</a:t>
             </a:r>
             <a:endParaRPr lang="en-US" sz="1100" dirty="0"/>
           </a:p>
@@ -24069,7 +24069,7 @@
                   <a:schemeClr val="accent1"/>
                 </a:solidFill>
               </a:rPr>
-              <a:t>“$71,400”</a:t>
+              <a:t>“sales process”</a:t>
             </a:r>
             <a:endParaRPr lang="en-US" sz="1200" dirty="0"/>
           </a:p>
@@ -24141,7 +24141,7 @@
                   <a:schemeClr val="accent1"/>
                 </a:solidFill>
               </a:rPr>
-              <a:t>“$71,400”</a:t>
+              <a:t>“sales process”</a:t>
             </a:r>
             <a:endParaRPr lang="en-US" sz="1600" dirty="0"/>
           </a:p>
@@ -24213,7 +24213,7 @@
                   <a:schemeClr val="tx1"/>
                 </a:solidFill>
               </a:rPr>
-              <a:t>The hero result is a pitch. The machine makes sales for the next machine.</a:t>
+              <a:t>The hero result is a sales tool. The machine’s big win is a price quote.</a:t>
             </a:r>
             <a:endParaRPr lang="en-US" sz="1600" dirty="0"/>
           </a:p>
@@ -24394,7 +24394,7 @@
                 <a:ea typeface="Century Schoolbook" pitchFamily="34" charset="-122"/>
                 <a:cs typeface="Century Schoolbook" pitchFamily="34" charset="-120"/>
               </a:rPr>
-              <a:t>Shot 5 · their 0:51–0:66</a:t>
+              <a:t>Shot 5 · their 0:58–0:65</a:t>
             </a:r>
             <a:endParaRPr lang="en-US" sz="2200" dirty="0"/>
           </a:p>
@@ -24457,7 +24457,7 @@
                   <a:schemeClr val="bg1"/>
                 </a:solidFill>
               </a:rPr>
-              <a:t>“thousands of apps” · “context of all my work” · “until now”</a:t>
+              <a:t>“the full context of all my work, across all my apps … until now”</a:t>
             </a:r>
             <a:endParaRPr lang="en-US" sz="1100" dirty="0"/>
           </a:p>
@@ -24840,7 +24840,7 @@
                 <a:ea typeface="Century Schoolbook" pitchFamily="34" charset="-122"/>
                 <a:cs typeface="Century Schoolbook" pitchFamily="34" charset="-120"/>
               </a:rPr>
-              <a:t>Shot 6 · their 0:67</a:t>
+              <a:t>Shot 6 · their 0:66–0:67</a:t>
             </a:r>
             <a:endParaRPr lang="en-US" sz="2200" dirty="0"/>
           </a:p>
@@ -24903,7 +24903,7 @@
                   <a:schemeClr val="bg1"/>
                 </a:solidFill>
               </a:rPr>
-              <a:t>“try Computer.”</a:t>
+              <a:t>“Click the link below to try Computer.”</a:t>
             </a:r>
             <a:endParaRPr lang="en-US" sz="1100" dirty="0"/>
           </a:p>
